--- a/RA5 - Legislacio i normativa/AA2 - LSSI/RA5_AA2_LSSI.pptx
+++ b/RA5 - Legislacio i normativa/AA2 - LSSI/RA5_AA2_LSSI.pptx
@@ -1962,6 +1962,10 @@
           </a:solidFill>
           <a:ln/>
         </p:spPr>
+        <p:txBody>
+          <a:bodyPr/>
+          <a:p/>
+        </p:txBody>
       </p:sp>
       <p:sp>
         <p:nvSpPr>
@@ -1982,6 +1986,10 @@
           </a:solidFill>
           <a:ln/>
         </p:spPr>
+        <p:txBody>
+          <a:bodyPr/>
+          <a:p/>
+        </p:txBody>
       </p:sp>
       <p:sp>
         <p:nvSpPr>
@@ -2407,6 +2415,10 @@
             </a:outerShdw>
           </a:effectLst>
         </p:spPr>
+        <p:txBody>
+          <a:bodyPr/>
+          <a:p/>
+        </p:txBody>
       </p:sp>
       <p:sp>
         <p:nvSpPr>
@@ -2427,6 +2439,10 @@
           </a:solidFill>
           <a:ln/>
         </p:spPr>
+        <p:txBody>
+          <a:bodyPr/>
+          <a:p/>
+        </p:txBody>
       </p:sp>
       <p:pic>
         <p:nvPicPr>
@@ -2566,6 +2582,10 @@
             </a:outerShdw>
           </a:effectLst>
         </p:spPr>
+        <p:txBody>
+          <a:bodyPr/>
+          <a:p/>
+        </p:txBody>
       </p:sp>
       <p:sp>
         <p:nvSpPr>
@@ -2586,6 +2606,10 @@
           </a:solidFill>
           <a:ln/>
         </p:spPr>
+        <p:txBody>
+          <a:bodyPr/>
+          <a:p/>
+        </p:txBody>
       </p:sp>
       <p:pic>
         <p:nvPicPr>
@@ -2713,6 +2737,10 @@
           </a:solidFill>
           <a:ln/>
         </p:spPr>
+        <p:txBody>
+          <a:bodyPr/>
+          <a:p/>
+        </p:txBody>
       </p:sp>
       <p:pic>
         <p:nvPicPr>
@@ -2962,6 +2990,10 @@
             </a:outerShdw>
           </a:effectLst>
         </p:spPr>
+        <p:txBody>
+          <a:bodyPr/>
+          <a:p/>
+        </p:txBody>
       </p:sp>
       <p:sp>
         <p:nvSpPr>
@@ -2982,6 +3014,10 @@
           </a:solidFill>
           <a:ln/>
         </p:spPr>
+        <p:txBody>
+          <a:bodyPr/>
+          <a:p/>
+        </p:txBody>
       </p:sp>
       <p:pic>
         <p:nvPicPr>
@@ -3121,6 +3157,10 @@
             </a:outerShdw>
           </a:effectLst>
         </p:spPr>
+        <p:txBody>
+          <a:bodyPr/>
+          <a:p/>
+        </p:txBody>
       </p:sp>
       <p:sp>
         <p:nvSpPr>
@@ -3141,6 +3181,10 @@
           </a:solidFill>
           <a:ln/>
         </p:spPr>
+        <p:txBody>
+          <a:bodyPr/>
+          <a:p/>
+        </p:txBody>
       </p:sp>
       <p:pic>
         <p:nvPicPr>
@@ -3280,6 +3324,10 @@
             </a:outerShdw>
           </a:effectLst>
         </p:spPr>
+        <p:txBody>
+          <a:bodyPr/>
+          <a:p/>
+        </p:txBody>
       </p:sp>
       <p:sp>
         <p:nvSpPr>
@@ -3300,6 +3348,10 @@
           </a:solidFill>
           <a:ln/>
         </p:spPr>
+        <p:txBody>
+          <a:bodyPr/>
+          <a:p/>
+        </p:txBody>
       </p:sp>
       <p:pic>
         <p:nvPicPr>
@@ -4118,7 +4170,7 @@
                 <a:ea typeface="Calibri" pitchFamily="34" charset="-122"/>
                 <a:cs typeface="Calibri" pitchFamily="34" charset="-120"/>
               </a:rPr>
-              <a:t>Llicència Creative Commons BY-NC-SA · Institut Obert de Catalunya, 2011 (materials adaptats i ampliats)</a:t>
+              <a:t>Llicència CC BY-SA 4.0 · Adaptat de "Materials" (SMX-0226SI), Carlos Alonso Martínez, Escola Pia de Mataró</a:t>
             </a:r>
             <a:endParaRPr lang="en-US" sz="1050" dirty="0"/>
           </a:p>
@@ -4345,6 +4397,10 @@
             </a:outerShdw>
           </a:effectLst>
         </p:spPr>
+        <p:txBody>
+          <a:bodyPr/>
+          <a:p/>
+        </p:txBody>
       </p:sp>
       <p:sp>
         <p:nvSpPr>
@@ -4365,6 +4421,10 @@
           </a:solidFill>
           <a:ln/>
         </p:spPr>
+        <p:txBody>
+          <a:bodyPr/>
+          <a:p/>
+        </p:txBody>
       </p:sp>
       <p:pic>
         <p:nvPicPr>
@@ -4504,6 +4564,10 @@
             </a:outerShdw>
           </a:effectLst>
         </p:spPr>
+        <p:txBody>
+          <a:bodyPr/>
+          <a:p/>
+        </p:txBody>
       </p:sp>
       <p:sp>
         <p:nvSpPr>
@@ -4524,6 +4588,10 @@
           </a:solidFill>
           <a:ln/>
         </p:spPr>
+        <p:txBody>
+          <a:bodyPr/>
+          <a:p/>
+        </p:txBody>
       </p:sp>
       <p:pic>
         <p:nvPicPr>
@@ -4663,6 +4731,10 @@
             </a:outerShdw>
           </a:effectLst>
         </p:spPr>
+        <p:txBody>
+          <a:bodyPr/>
+          <a:p/>
+        </p:txBody>
       </p:sp>
       <p:sp>
         <p:nvSpPr>
@@ -4683,6 +4755,10 @@
           </a:solidFill>
           <a:ln/>
         </p:spPr>
+        <p:txBody>
+          <a:bodyPr/>
+          <a:p/>
+        </p:txBody>
       </p:sp>
       <p:pic>
         <p:nvPicPr>
@@ -5352,6 +5428,10 @@
             </a:outerShdw>
           </a:effectLst>
         </p:spPr>
+        <p:txBody>
+          <a:bodyPr/>
+          <a:p/>
+        </p:txBody>
       </p:sp>
       <p:sp>
         <p:nvSpPr>
@@ -5372,6 +5452,10 @@
           </a:solidFill>
           <a:ln/>
         </p:spPr>
+        <p:txBody>
+          <a:bodyPr/>
+          <a:p/>
+        </p:txBody>
       </p:sp>
       <p:pic>
         <p:nvPicPr>
@@ -5511,6 +5595,10 @@
             </a:outerShdw>
           </a:effectLst>
         </p:spPr>
+        <p:txBody>
+          <a:bodyPr/>
+          <a:p/>
+        </p:txBody>
       </p:sp>
       <p:sp>
         <p:nvSpPr>
@@ -5531,6 +5619,10 @@
           </a:solidFill>
           <a:ln/>
         </p:spPr>
+        <p:txBody>
+          <a:bodyPr/>
+          <a:p/>
+        </p:txBody>
       </p:sp>
       <p:pic>
         <p:nvPicPr>
@@ -5807,6 +5899,10 @@
           </a:solidFill>
           <a:ln/>
         </p:spPr>
+        <p:txBody>
+          <a:bodyPr/>
+          <a:p/>
+        </p:txBody>
       </p:sp>
       <p:pic>
         <p:nvPicPr>
@@ -6126,6 +6222,10 @@
             </a:outerShdw>
           </a:effectLst>
         </p:spPr>
+        <p:txBody>
+          <a:bodyPr/>
+          <a:p/>
+        </p:txBody>
       </p:sp>
       <p:sp>
         <p:nvSpPr>
@@ -6146,6 +6246,10 @@
           </a:solidFill>
           <a:ln/>
         </p:spPr>
+        <p:txBody>
+          <a:bodyPr/>
+          <a:p/>
+        </p:txBody>
       </p:sp>
       <p:pic>
         <p:nvPicPr>
@@ -6285,6 +6389,10 @@
             </a:outerShdw>
           </a:effectLst>
         </p:spPr>
+        <p:txBody>
+          <a:bodyPr/>
+          <a:p/>
+        </p:txBody>
       </p:sp>
       <p:sp>
         <p:nvSpPr>
@@ -6305,6 +6413,10 @@
           </a:solidFill>
           <a:ln/>
         </p:spPr>
+        <p:txBody>
+          <a:bodyPr/>
+          <a:p/>
+        </p:txBody>
       </p:sp>
       <p:pic>
         <p:nvPicPr>
@@ -6432,6 +6544,10 @@
           </a:solidFill>
           <a:ln/>
         </p:spPr>
+        <p:txBody>
+          <a:bodyPr/>
+          <a:p/>
+        </p:txBody>
       </p:sp>
       <p:pic>
         <p:nvPicPr>
@@ -7318,6 +7434,10 @@
           </a:solidFill>
           <a:ln/>
         </p:spPr>
+        <p:txBody>
+          <a:bodyPr/>
+          <a:p/>
+        </p:txBody>
       </p:sp>
       <p:pic>
         <p:nvPicPr>
@@ -7892,6 +8012,10 @@
           </a:solidFill>
           <a:ln/>
         </p:spPr>
+        <p:txBody>
+          <a:bodyPr/>
+          <a:p/>
+        </p:txBody>
       </p:sp>
       <p:pic>
         <p:nvPicPr>
